--- a/retrieval-quiz-quiz-trade-template.pptx
+++ b/retrieval-quiz-quiz-trade-template.pptx
@@ -2,13 +2,13 @@
 <file path=ppt/presentation.xml><?xml version="1.0" encoding="utf-8"?>
 <p:presentation xmlns:p="http://schemas.openxmlformats.org/presentationml/2006/main">
   <p:sldMasterIdLst>
-    <p:sldMasterId xmlns:r="http://schemas.openxmlformats.org/officeDocument/2006/relationships" id="2147483648" r:id="R8d8f8684c324425d"/>
+    <p:sldMasterId xmlns:r="http://schemas.openxmlformats.org/officeDocument/2006/relationships" id="2147483648" r:id="R9f2301af90ad4c70"/>
   </p:sldMasterIdLst>
   <p:notesMasterIdLst>
-    <p:notesMasterId xmlns:r="http://schemas.openxmlformats.org/officeDocument/2006/relationships" r:id="R098ac5c72b674177"/>
+    <p:notesMasterId xmlns:r="http://schemas.openxmlformats.org/officeDocument/2006/relationships" r:id="Rddaf8f8220a34e64"/>
   </p:notesMasterIdLst>
   <p:sldIdLst>
-    <p:sldId xmlns:r="http://schemas.openxmlformats.org/officeDocument/2006/relationships" id="256" r:id="R97acfed8e51c4f8c"/>
+    <p:sldId xmlns:r="http://schemas.openxmlformats.org/officeDocument/2006/relationships" id="256" r:id="Rde4b9735bb6c4c88"/>
   </p:sldIdLst>
   <p:sldSz cx="12192000" cy="6858000"/>
   <p:notesSz cx="6858000" cy="9144000"/>
@@ -442,62 +442,7 @@
           <a:lstStyle xmlns:a="http://schemas.openxmlformats.org/drawingml/2006/main"/>
           <a:p xmlns:a="http://schemas.openxmlformats.org/drawingml/2006/main">
             <a:r>
-              <a:t>Teacher setup: Replace bracketed text before teaching. All text and shapes are editable. Duplicate the slide for answers or another prompt. For card activities, separate prompt and answer sides before printing.</a:t>
-            </a:r>
-          </a:p>
-          <a:p xmlns:a="http://schemas.openxmlformats.org/drawingml/2006/main">
-            <a:r>
-              <a:t/>
-            </a:r>
-          </a:p>
-          <a:p xmlns:a="http://schemas.openxmlformats.org/drawingml/2006/main">
-            <a:r>
-              <a:t>Materials: Teacher-checked prompt cards with answers on the back</a:t>
-            </a:r>
-          </a:p>
-          <a:p xmlns:a="http://schemas.openxmlformats.org/drawingml/2006/main">
-            <a:r>
-              <a:t>Suggested time including feedback: 10 minutes.</a:t>
-            </a:r>
-          </a:p>
-          <a:p xmlns:a="http://schemas.openxmlformats.org/drawingml/2006/main">
-            <a:r>
-              <a:t/>
-            </a:r>
-          </a:p>
-          <a:p xmlns:a="http://schemas.openxmlformats.org/drawingml/2006/main">
-            <a:r>
-              <a:t>1. Pair up: Give each learner a checked card; pair students safely.</a:t>
-            </a:r>
-          </a:p>
-          <a:p xmlns:a="http://schemas.openxmlformats.org/drawingml/2006/main">
-            <a:r>
-              <a:t>2. Quiz both ways: One partner asks; the other answers from memory. Then reverse roles.</a:t>
-            </a:r>
-          </a:p>
-          <a:p xmlns:a="http://schemas.openxmlformats.org/drawingml/2006/main">
-            <a:r>
-              <a:t>3. Check together: Use the card answer to correct or extend each response.</a:t>
-            </a:r>
-          </a:p>
-          <a:p xmlns:a="http://schemas.openxmlformats.org/drawingml/2006/main">
-            <a:r>
-              <a:t>4. Trade and repeat: Exchange cards and work with a new partner, or rotate seated partners.</a:t>
-            </a:r>
-          </a:p>
-          <a:p xmlns:a="http://schemas.openxmlformats.org/drawingml/2006/main">
-            <a:r>
-              <a:t/>
-            </a:r>
-          </a:p>
-          <a:p xmlns:a="http://schemas.openxmlformats.org/drawingml/2006/main">
-            <a:r>
-              <a:t>Check: Keep the answer hidden until an attempt. Sample explanations to catch inaccurate peer coaching.</a:t>
-            </a:r>
-          </a:p>
-          <a:p xmlns:a="http://schemas.openxmlformats.org/drawingml/2006/main">
-            <a:r>
-              <a:t>Adapt: Offer a seated rotation and read prompts aloud where helpful.</a:t>
+              <a:t>Replace bracketed text with your own taught prompts and checked answers. All labels and response areas are editable. Give everyone an independent attempt before revealing answers. Duplicate the slide for answers or another prompt. For cards, print the prompt and answer on opposite sides or fold them to keep answers hidden.</a:t>
             </a:r>
           </a:p>
         </p:txBody>
@@ -544,7 +489,7 @@
           <p:cNvPr id="4" name="Accent rule">
             <a:extLst xmlns:a="http://schemas.openxmlformats.org/drawingml/2006/main">
               <a:ext uri="{FF2B5EF4-FFF2-40B4-BE49-F238E27FC236}">
-                <a16:creationId xmlns:a16="http://schemas.microsoft.com/office/drawing/2014/main" id="{E7AB25BE-AB19-45F9-ADB1-21B8C558EE41}"/>
+                <a16:creationId xmlns:a16="http://schemas.microsoft.com/office/drawing/2014/main" id="{EA65E943-A702-47CB-9CDC-53CD972CFF76}"/>
               </a:ext>
             </a:extLst>
           </p:cNvPr>
@@ -575,7 +520,7 @@
           <p:cNvPr id="2" name="Title">
             <a:extLst xmlns:a="http://schemas.openxmlformats.org/drawingml/2006/main">
               <a:ext uri="{FF2B5EF4-FFF2-40B4-BE49-F238E27FC236}">
-                <a16:creationId xmlns:a16="http://schemas.microsoft.com/office/drawing/2014/main" id="{88C1EFAC-830A-4B9E-A769-D587A68C5C79}"/>
+                <a16:creationId xmlns:a16="http://schemas.microsoft.com/office/drawing/2014/main" id="{0621DBB7-324C-417F-AF3E-A608ADAB398C}"/>
               </a:ext>
             </a:extLst>
           </p:cNvPr>
@@ -722,7 +667,7 @@
           <p:cNvPr id="3" name="Subtitle">
             <a:extLst xmlns:a="http://schemas.openxmlformats.org/drawingml/2006/main">
               <a:ext uri="{FF2B5EF4-FFF2-40B4-BE49-F238E27FC236}">
-                <a16:creationId xmlns:a16="http://schemas.microsoft.com/office/drawing/2014/main" id="{3BE31983-D39F-4C73-969D-639670543D3B}"/>
+                <a16:creationId xmlns:a16="http://schemas.microsoft.com/office/drawing/2014/main" id="{45A9125D-64C3-43CD-AC70-9BB050E78D99}"/>
               </a:ext>
             </a:extLst>
           </p:cNvPr>
@@ -886,7 +831,7 @@
           <p:cNvPr id="3" name="Accent rule">
             <a:extLst xmlns:a="http://schemas.openxmlformats.org/drawingml/2006/main">
               <a:ext uri="{FF2B5EF4-FFF2-40B4-BE49-F238E27FC236}">
-                <a16:creationId xmlns:a16="http://schemas.microsoft.com/office/drawing/2014/main" id="{33A1475A-9950-43D4-B804-CB28FC2F11DC}"/>
+                <a16:creationId xmlns:a16="http://schemas.microsoft.com/office/drawing/2014/main" id="{9E57266F-9AAC-4225-9110-145467B3068C}"/>
               </a:ext>
             </a:extLst>
           </p:cNvPr>
@@ -917,7 +862,7 @@
           <p:cNvPr id="2" name="Section title">
             <a:extLst xmlns:a="http://schemas.openxmlformats.org/drawingml/2006/main">
               <a:ext uri="{FF2B5EF4-FFF2-40B4-BE49-F238E27FC236}">
-                <a16:creationId xmlns:a16="http://schemas.microsoft.com/office/drawing/2014/main" id="{DFA19428-23DD-41B1-B1E4-C3CD6A869E08}"/>
+                <a16:creationId xmlns:a16="http://schemas.microsoft.com/office/drawing/2014/main" id="{C81FB26C-5763-417A-9B9A-79501F0ABB2A}"/>
               </a:ext>
             </a:extLst>
           </p:cNvPr>
@@ -1081,7 +1026,7 @@
           <p:cNvPr id="4" name="Accent rule">
             <a:extLst xmlns:a="http://schemas.openxmlformats.org/drawingml/2006/main">
               <a:ext uri="{FF2B5EF4-FFF2-40B4-BE49-F238E27FC236}">
-                <a16:creationId xmlns:a16="http://schemas.microsoft.com/office/drawing/2014/main" id="{AE866F35-63B2-41F6-BF9C-28A7888AFEBD}"/>
+                <a16:creationId xmlns:a16="http://schemas.microsoft.com/office/drawing/2014/main" id="{7D30B1F9-1FD1-4364-802D-631418EF4237}"/>
               </a:ext>
             </a:extLst>
           </p:cNvPr>
@@ -1112,7 +1057,7 @@
           <p:cNvPr id="2" name="Title">
             <a:extLst xmlns:a="http://schemas.openxmlformats.org/drawingml/2006/main">
               <a:ext uri="{FF2B5EF4-FFF2-40B4-BE49-F238E27FC236}">
-                <a16:creationId xmlns:a16="http://schemas.microsoft.com/office/drawing/2014/main" id="{653D1995-9A3F-4122-AD52-E3332F766419}"/>
+                <a16:creationId xmlns:a16="http://schemas.microsoft.com/office/drawing/2014/main" id="{99E5B48D-F7D6-4C7E-9FC6-AA6E61A43059}"/>
               </a:ext>
             </a:extLst>
           </p:cNvPr>
@@ -1259,7 +1204,7 @@
           <p:cNvPr id="3" name="Body">
             <a:extLst xmlns:a="http://schemas.openxmlformats.org/drawingml/2006/main">
               <a:ext uri="{FF2B5EF4-FFF2-40B4-BE49-F238E27FC236}">
-                <a16:creationId xmlns:a16="http://schemas.microsoft.com/office/drawing/2014/main" id="{1877C377-1CE4-480F-AF22-00A2E27AFEE9}"/>
+                <a16:creationId xmlns:a16="http://schemas.microsoft.com/office/drawing/2014/main" id="{248B04A4-3E46-4F96-B380-176780BCE6A9}"/>
               </a:ext>
             </a:extLst>
           </p:cNvPr>
@@ -1423,7 +1368,7 @@
           <p:cNvPr id="5" name="Accent rule">
             <a:extLst xmlns:a="http://schemas.openxmlformats.org/drawingml/2006/main">
               <a:ext uri="{FF2B5EF4-FFF2-40B4-BE49-F238E27FC236}">
-                <a16:creationId xmlns:a16="http://schemas.microsoft.com/office/drawing/2014/main" id="{012EA409-338C-4793-BA7D-F459D72D8A21}"/>
+                <a16:creationId xmlns:a16="http://schemas.microsoft.com/office/drawing/2014/main" id="{DDA44320-8A80-4D77-9570-084B596C32B8}"/>
               </a:ext>
             </a:extLst>
           </p:cNvPr>
@@ -1454,7 +1399,7 @@
           <p:cNvPr id="2" name="Title">
             <a:extLst xmlns:a="http://schemas.openxmlformats.org/drawingml/2006/main">
               <a:ext uri="{FF2B5EF4-FFF2-40B4-BE49-F238E27FC236}">
-                <a16:creationId xmlns:a16="http://schemas.microsoft.com/office/drawing/2014/main" id="{35CB68D7-0FD3-427C-9859-CE93D94AD3B0}"/>
+                <a16:creationId xmlns:a16="http://schemas.microsoft.com/office/drawing/2014/main" id="{34AE4F0F-5CC7-45D8-A0A2-FBE967DBC6E1}"/>
               </a:ext>
             </a:extLst>
           </p:cNvPr>
@@ -1601,7 +1546,7 @@
           <p:cNvPr id="3" name="Left column">
             <a:extLst xmlns:a="http://schemas.openxmlformats.org/drawingml/2006/main">
               <a:ext uri="{FF2B5EF4-FFF2-40B4-BE49-F238E27FC236}">
-                <a16:creationId xmlns:a16="http://schemas.microsoft.com/office/drawing/2014/main" id="{FA3ECD73-6466-4EE4-BE10-B1AF5B7753E2}"/>
+                <a16:creationId xmlns:a16="http://schemas.microsoft.com/office/drawing/2014/main" id="{4E6FDD92-2B97-4453-A3B9-821F481B9EA4}"/>
               </a:ext>
             </a:extLst>
           </p:cNvPr>
@@ -1748,7 +1693,7 @@
           <p:cNvPr id="4" name="Right column">
             <a:extLst xmlns:a="http://schemas.openxmlformats.org/drawingml/2006/main">
               <a:ext uri="{FF2B5EF4-FFF2-40B4-BE49-F238E27FC236}">
-                <a16:creationId xmlns:a16="http://schemas.microsoft.com/office/drawing/2014/main" id="{CABEA542-A1F4-462A-BCD1-C7355A426289}"/>
+                <a16:creationId xmlns:a16="http://schemas.microsoft.com/office/drawing/2014/main" id="{43827658-F08C-476F-BB21-4B8DEA69231C}"/>
               </a:ext>
             </a:extLst>
           </p:cNvPr>
@@ -1912,7 +1857,7 @@
           <p:cNvPr id="4" name="Accent rule">
             <a:extLst xmlns:a="http://schemas.openxmlformats.org/drawingml/2006/main">
               <a:ext uri="{FF2B5EF4-FFF2-40B4-BE49-F238E27FC236}">
-                <a16:creationId xmlns:a16="http://schemas.microsoft.com/office/drawing/2014/main" id="{599640FC-AA7E-470F-A821-CAF549D3214D}"/>
+                <a16:creationId xmlns:a16="http://schemas.microsoft.com/office/drawing/2014/main" id="{02FFA672-F1EB-40C0-A403-DA375C3BD347}"/>
               </a:ext>
             </a:extLst>
           </p:cNvPr>
@@ -1943,7 +1888,7 @@
           <p:cNvPr id="2" name="Title">
             <a:extLst xmlns:a="http://schemas.openxmlformats.org/drawingml/2006/main">
               <a:ext uri="{FF2B5EF4-FFF2-40B4-BE49-F238E27FC236}">
-                <a16:creationId xmlns:a16="http://schemas.microsoft.com/office/drawing/2014/main" id="{5727E8AB-B1FF-4FF5-BE3F-8525D9D816C9}"/>
+                <a16:creationId xmlns:a16="http://schemas.microsoft.com/office/drawing/2014/main" id="{4D57E2A1-5D9D-4433-B9F2-275626475DDE}"/>
               </a:ext>
             </a:extLst>
           </p:cNvPr>
@@ -2090,7 +2035,7 @@
           <p:cNvPr id="3" name="Left column">
             <a:extLst xmlns:a="http://schemas.openxmlformats.org/drawingml/2006/main">
               <a:ext uri="{FF2B5EF4-FFF2-40B4-BE49-F238E27FC236}">
-                <a16:creationId xmlns:a16="http://schemas.microsoft.com/office/drawing/2014/main" id="{C29F7252-8E22-492D-A5EA-8322AE9AFF24}"/>
+                <a16:creationId xmlns:a16="http://schemas.microsoft.com/office/drawing/2014/main" id="{64C452D6-7ECD-4D36-B1C1-6762192E049E}"/>
               </a:ext>
             </a:extLst>
           </p:cNvPr>
@@ -2275,12 +2220,12 @@
   </p:cSld>
   <p:clrMap bg1="lt1" tx1="dk1" bg2="lt2" tx2="dk2" accent1="accent1" accent2="accent2" accent3="accent3" accent4="accent4" accent5="accent5" accent6="accent6" hlink="hlink" folHlink="folHlink"/>
   <p:sldLayoutIdLst>
-    <p:sldLayoutId xmlns:r="http://schemas.openxmlformats.org/officeDocument/2006/relationships" id="2147483649" r:id="R4d41baae9b9b440a"/>
-    <p:sldLayoutId xmlns:r="http://schemas.openxmlformats.org/officeDocument/2006/relationships" id="2147483650" r:id="R9f81194b98334b98"/>
-    <p:sldLayoutId xmlns:r="http://schemas.openxmlformats.org/officeDocument/2006/relationships" id="2147483651" r:id="Rb7b7f33d61ef4120"/>
-    <p:sldLayoutId xmlns:r="http://schemas.openxmlformats.org/officeDocument/2006/relationships" id="2147483652" r:id="R048e72609dfc418c"/>
-    <p:sldLayoutId xmlns:r="http://schemas.openxmlformats.org/officeDocument/2006/relationships" id="2147483653" r:id="Rb20b02e7ddd141b2"/>
-    <p:sldLayoutId xmlns:r="http://schemas.openxmlformats.org/officeDocument/2006/relationships" id="2147483654" r:id="Rff84081b84954595"/>
+    <p:sldLayoutId xmlns:r="http://schemas.openxmlformats.org/officeDocument/2006/relationships" id="2147483649" r:id="R1b2a55c69b934e8d"/>
+    <p:sldLayoutId xmlns:r="http://schemas.openxmlformats.org/officeDocument/2006/relationships" id="2147483650" r:id="Rfdd8b90083384eff"/>
+    <p:sldLayoutId xmlns:r="http://schemas.openxmlformats.org/officeDocument/2006/relationships" id="2147483651" r:id="R5181734d109f4fc6"/>
+    <p:sldLayoutId xmlns:r="http://schemas.openxmlformats.org/officeDocument/2006/relationships" id="2147483652" r:id="Rccf113ea707143e8"/>
+    <p:sldLayoutId xmlns:r="http://schemas.openxmlformats.org/officeDocument/2006/relationships" id="2147483653" r:id="R1aa374c7ec984c1c"/>
+    <p:sldLayoutId xmlns:r="http://schemas.openxmlformats.org/officeDocument/2006/relationships" id="2147483654" r:id="R387e85a31191480d"/>
   </p:sldLayoutIdLst>
   <p:txStyles>
     <p:titleStyle>
@@ -2831,7 +2776,7 @@
           <p:cNvPr id="19" name="">
             <a:extLst xmlns:a="http://schemas.openxmlformats.org/drawingml/2006/main">
               <a:ext uri="{FF2B5EF4-FFF2-40B4-BE49-F238E27FC236}">
-                <a16:creationId xmlns:a16="http://schemas.microsoft.com/office/drawing/2014/main" id="{2E55D0E5-845D-4765-AEF2-2CD35B265F50}"/>
+                <a16:creationId xmlns:a16="http://schemas.microsoft.com/office/drawing/2014/main" id="{DAB97381-0121-4C5C-97FC-3C26DCCFAEE4}"/>
               </a:ext>
             </a:extLst>
           </p:cNvPr>
@@ -2888,7 +2833,7 @@
           <p:cNvPr id="2" name="">
             <a:extLst xmlns:a="http://schemas.openxmlformats.org/drawingml/2006/main">
               <a:ext uri="{FF2B5EF4-FFF2-40B4-BE49-F238E27FC236}">
-                <a16:creationId xmlns:a16="http://schemas.microsoft.com/office/drawing/2014/main" id="{8BB8BE7A-AE02-490F-87FB-5235BCCE1C91}"/>
+                <a16:creationId xmlns:a16="http://schemas.microsoft.com/office/drawing/2014/main" id="{126BF898-B928-47E5-856C-97C332924997}"/>
               </a:ext>
             </a:extLst>
           </p:cNvPr>
@@ -2945,7 +2890,7 @@
           <p:cNvPr id="3" name="">
             <a:extLst xmlns:a="http://schemas.openxmlformats.org/drawingml/2006/main">
               <a:ext uri="{FF2B5EF4-FFF2-40B4-BE49-F238E27FC236}">
-                <a16:creationId xmlns:a16="http://schemas.microsoft.com/office/drawing/2014/main" id="{B0D3853C-12C7-4F36-8922-436CC149486E}"/>
+                <a16:creationId xmlns:a16="http://schemas.microsoft.com/office/drawing/2014/main" id="{9E275207-52EF-4157-950D-210E34E13C4A}"/>
               </a:ext>
             </a:extLst>
           </p:cNvPr>
@@ -2975,7 +2920,7 @@
           <p:cNvPr id="4" name="">
             <a:extLst xmlns:a="http://schemas.openxmlformats.org/drawingml/2006/main">
               <a:ext uri="{FF2B5EF4-FFF2-40B4-BE49-F238E27FC236}">
-                <a16:creationId xmlns:a16="http://schemas.microsoft.com/office/drawing/2014/main" id="{F2668192-1CB0-4D4C-A2AA-9ED10BFC76C7}"/>
+                <a16:creationId xmlns:a16="http://schemas.microsoft.com/office/drawing/2014/main" id="{698FA855-8D55-4150-82A8-DA14987B3619}"/>
               </a:ext>
             </a:extLst>
           </p:cNvPr>
@@ -3032,7 +2977,7 @@
           <p:cNvPr id="5" name="">
             <a:extLst xmlns:a="http://schemas.openxmlformats.org/drawingml/2006/main">
               <a:ext uri="{FF2B5EF4-FFF2-40B4-BE49-F238E27FC236}">
-                <a16:creationId xmlns:a16="http://schemas.microsoft.com/office/drawing/2014/main" id="{FF45B8DC-FB6A-4FE3-B928-982E81EFA5D7}"/>
+                <a16:creationId xmlns:a16="http://schemas.microsoft.com/office/drawing/2014/main" id="{B4D8D838-5F57-4F17-BDDC-2DB50DBBCDC1}"/>
               </a:ext>
             </a:extLst>
           </p:cNvPr>
@@ -3089,7 +3034,7 @@
           <p:cNvPr id="6" name="">
             <a:extLst xmlns:a="http://schemas.openxmlformats.org/drawingml/2006/main">
               <a:ext uri="{FF2B5EF4-FFF2-40B4-BE49-F238E27FC236}">
-                <a16:creationId xmlns:a16="http://schemas.microsoft.com/office/drawing/2014/main" id="{7F2EFF3A-0DBC-447F-87E9-13FE1497A7BB}"/>
+                <a16:creationId xmlns:a16="http://schemas.microsoft.com/office/drawing/2014/main" id="{A36772F6-417B-41DB-90E6-CBEA2D589B3C}"/>
               </a:ext>
             </a:extLst>
           </p:cNvPr>
@@ -3121,7 +3066,7 @@
           <p:cNvPr id="7" name="">
             <a:extLst xmlns:a="http://schemas.openxmlformats.org/drawingml/2006/main">
               <a:ext uri="{FF2B5EF4-FFF2-40B4-BE49-F238E27FC236}">
-                <a16:creationId xmlns:a16="http://schemas.microsoft.com/office/drawing/2014/main" id="{6E3740BF-25A6-4E25-9336-69916CFAEE7D}"/>
+                <a16:creationId xmlns:a16="http://schemas.microsoft.com/office/drawing/2014/main" id="{7B921A4A-2A6C-4FA8-8CBF-28671E9E0584}"/>
               </a:ext>
             </a:extLst>
           </p:cNvPr>
@@ -3151,7 +3096,7 @@
           <p:cNvPr id="8" name="">
             <a:extLst xmlns:a="http://schemas.openxmlformats.org/drawingml/2006/main">
               <a:ext uri="{FF2B5EF4-FFF2-40B4-BE49-F238E27FC236}">
-                <a16:creationId xmlns:a16="http://schemas.microsoft.com/office/drawing/2014/main" id="{290835EB-4A33-4D0B-9204-79E2377234D7}"/>
+                <a16:creationId xmlns:a16="http://schemas.microsoft.com/office/drawing/2014/main" id="{01493376-C260-41D8-A7BB-6C07979E925C}"/>
               </a:ext>
             </a:extLst>
           </p:cNvPr>
@@ -3208,7 +3153,7 @@
           <p:cNvPr id="9" name="">
             <a:extLst xmlns:a="http://schemas.openxmlformats.org/drawingml/2006/main">
               <a:ext uri="{FF2B5EF4-FFF2-40B4-BE49-F238E27FC236}">
-                <a16:creationId xmlns:a16="http://schemas.microsoft.com/office/drawing/2014/main" id="{2AA30B31-D512-4D34-8AAE-5EA8495CDF2A}"/>
+                <a16:creationId xmlns:a16="http://schemas.microsoft.com/office/drawing/2014/main" id="{77D8729F-906B-4E96-B4F3-15133AC64258}"/>
               </a:ext>
             </a:extLst>
           </p:cNvPr>
@@ -3265,7 +3210,7 @@
           <p:cNvPr id="10" name="">
             <a:extLst xmlns:a="http://schemas.openxmlformats.org/drawingml/2006/main">
               <a:ext uri="{FF2B5EF4-FFF2-40B4-BE49-F238E27FC236}">
-                <a16:creationId xmlns:a16="http://schemas.microsoft.com/office/drawing/2014/main" id="{DF8FEBB6-1404-40DF-87F7-B19BB3B4C2A7}"/>
+                <a16:creationId xmlns:a16="http://schemas.microsoft.com/office/drawing/2014/main" id="{95489A7B-2571-4A2C-8EFA-11953EFD9304}"/>
               </a:ext>
             </a:extLst>
           </p:cNvPr>
@@ -3322,7 +3267,7 @@
           <p:cNvPr id="11" name="">
             <a:extLst xmlns:a="http://schemas.openxmlformats.org/drawingml/2006/main">
               <a:ext uri="{FF2B5EF4-FFF2-40B4-BE49-F238E27FC236}">
-                <a16:creationId xmlns:a16="http://schemas.microsoft.com/office/drawing/2014/main" id="{535890CD-15B5-4550-813E-0B183A76F43D}"/>
+                <a16:creationId xmlns:a16="http://schemas.microsoft.com/office/drawing/2014/main" id="{65C11BD2-1B6B-4CAA-8648-0445A832EA50}"/>
               </a:ext>
             </a:extLst>
           </p:cNvPr>
@@ -3354,7 +3299,7 @@
           <p:cNvPr id="12" name="">
             <a:extLst xmlns:a="http://schemas.openxmlformats.org/drawingml/2006/main">
               <a:ext uri="{FF2B5EF4-FFF2-40B4-BE49-F238E27FC236}">
-                <a16:creationId xmlns:a16="http://schemas.microsoft.com/office/drawing/2014/main" id="{A9711209-7CBD-4871-87D1-859E6864D122}"/>
+                <a16:creationId xmlns:a16="http://schemas.microsoft.com/office/drawing/2014/main" id="{03AE85A2-6F76-429D-8DD7-613BC9638531}"/>
               </a:ext>
             </a:extLst>
           </p:cNvPr>
@@ -3384,7 +3329,7 @@
           <p:cNvPr id="13" name="">
             <a:extLst xmlns:a="http://schemas.openxmlformats.org/drawingml/2006/main">
               <a:ext uri="{FF2B5EF4-FFF2-40B4-BE49-F238E27FC236}">
-                <a16:creationId xmlns:a16="http://schemas.microsoft.com/office/drawing/2014/main" id="{40BBC020-18EF-44B0-9C25-E0F560E5E374}"/>
+                <a16:creationId xmlns:a16="http://schemas.microsoft.com/office/drawing/2014/main" id="{BC5BAB46-CC59-41A9-A552-4538785D764B}"/>
               </a:ext>
             </a:extLst>
           </p:cNvPr>
@@ -3441,7 +3386,7 @@
           <p:cNvPr id="14" name="">
             <a:extLst xmlns:a="http://schemas.openxmlformats.org/drawingml/2006/main">
               <a:ext uri="{FF2B5EF4-FFF2-40B4-BE49-F238E27FC236}">
-                <a16:creationId xmlns:a16="http://schemas.microsoft.com/office/drawing/2014/main" id="{394EB88C-4A3B-4C61-B3CA-03A94D3EB2EC}"/>
+                <a16:creationId xmlns:a16="http://schemas.microsoft.com/office/drawing/2014/main" id="{16BDC844-1F54-44D7-BEC5-C762D45CA29B}"/>
               </a:ext>
             </a:extLst>
           </p:cNvPr>
@@ -3498,7 +3443,7 @@
           <p:cNvPr id="15" name="">
             <a:extLst xmlns:a="http://schemas.openxmlformats.org/drawingml/2006/main">
               <a:ext uri="{FF2B5EF4-FFF2-40B4-BE49-F238E27FC236}">
-                <a16:creationId xmlns:a16="http://schemas.microsoft.com/office/drawing/2014/main" id="{BF91A32A-4DE3-44B4-9DFE-B040D806F11C}"/>
+                <a16:creationId xmlns:a16="http://schemas.microsoft.com/office/drawing/2014/main" id="{F5CA3BDD-DAB7-47DD-B609-30EC780386F9}"/>
               </a:ext>
             </a:extLst>
           </p:cNvPr>
@@ -3555,7 +3500,7 @@
           <p:cNvPr id="16" name="">
             <a:extLst xmlns:a="http://schemas.openxmlformats.org/drawingml/2006/main">
               <a:ext uri="{FF2B5EF4-FFF2-40B4-BE49-F238E27FC236}">
-                <a16:creationId xmlns:a16="http://schemas.microsoft.com/office/drawing/2014/main" id="{D2F61413-CCF8-4D83-BFF1-82E19B85196B}"/>
+                <a16:creationId xmlns:a16="http://schemas.microsoft.com/office/drawing/2014/main" id="{85CF79F5-8B43-453A-BC8B-EE41DA533B11}"/>
               </a:ext>
             </a:extLst>
           </p:cNvPr>
@@ -3585,7 +3530,7 @@
           <p:cNvPr id="17" name="">
             <a:extLst xmlns:a="http://schemas.openxmlformats.org/drawingml/2006/main">
               <a:ext uri="{FF2B5EF4-FFF2-40B4-BE49-F238E27FC236}">
-                <a16:creationId xmlns:a16="http://schemas.microsoft.com/office/drawing/2014/main" id="{D2373648-856F-4CDA-A517-95E8FEE23863}"/>
+                <a16:creationId xmlns:a16="http://schemas.microsoft.com/office/drawing/2014/main" id="{394F0940-6B56-4628-9D46-08404934D9D7}"/>
               </a:ext>
             </a:extLst>
           </p:cNvPr>
@@ -3642,7 +3587,7 @@
           <p:cNvPr id="18" name="">
             <a:extLst xmlns:a="http://schemas.openxmlformats.org/drawingml/2006/main">
               <a:ext uri="{FF2B5EF4-FFF2-40B4-BE49-F238E27FC236}">
-                <a16:creationId xmlns:a16="http://schemas.microsoft.com/office/drawing/2014/main" id="{B4EC24B7-7186-4204-906E-7439E1B03D0D}"/>
+                <a16:creationId xmlns:a16="http://schemas.microsoft.com/office/drawing/2014/main" id="{BD394B6B-0631-4714-93BF-6907CF6DF38E}"/>
               </a:ext>
             </a:extLst>
           </p:cNvPr>
@@ -3697,7 +3642,7 @@
     </p:spTree>
     <p:extLst>
       <p:ext uri="{BB962C8B-B14F-4D97-AF65-F5344CB8AC3E}">
-        <p14:creationId xmlns:p14="http://schemas.microsoft.com/office/powerpoint/2010/main" val="633867263"/>
+        <p14:creationId xmlns:p14="http://schemas.microsoft.com/office/powerpoint/2010/main" val="1015459054"/>
       </p:ext>
     </p:extLst>
   </p:cSld>
